--- a/6th Sem/Data mining and warehouse/Unit_1_new.pptx
+++ b/6th Sem/Data mining and warehouse/Unit_1_new.pptx
@@ -6687,7 +6687,7 @@
         </p:spPr>
         <p:txBody>
           <a:bodyPr>
-            <a:normAutofit/>
+            <a:normAutofit lnSpcReduction="10000"/>
           </a:bodyPr>
           <a:lstStyle/>
           <a:p>
@@ -6710,8 +6710,12 @@
           </a:p>
           <a:p>
             <a:r>
+              <a:rPr lang="en-US" b="1" u="sng" dirty="0"/>
+              <a:t>Data Consolidation:</a:t>
+            </a:r>
+            <a:r>
               <a:rPr lang="en-US" u="sng" dirty="0"/>
-              <a:t>Data Consolidation: </a:t>
+              <a:t> </a:t>
             </a:r>
             <a:r>
               <a:rPr lang="en-US" dirty="0"/>
@@ -6721,22 +6725,26 @@
           </a:p>
           <a:p>
             <a:r>
+              <a:rPr lang="en-US" b="1" u="sng" dirty="0"/>
+              <a:t>Data Cleaning: </a:t>
+            </a:r>
+            <a:r>
+              <a:rPr lang="en-US" dirty="0"/>
+              <a:t>The process of identifying and removing errors, inconsistencies, and irrelevant data from the data sources before they are integrated into the data warehouse. This helps ensure the data is accurate and trustworthy.</a:t>
+            </a:r>
+            <a:endParaRPr lang="en-US" dirty="0"/>
+          </a:p>
+          <a:p>
+            <a:endParaRPr lang="en-US" dirty="0"/>
+          </a:p>
+          <a:p>
+            <a:r>
+              <a:rPr lang="en-US" b="1" u="sng" dirty="0"/>
+              <a:t>Data Integration:</a:t>
+            </a:r>
+            <a:r>
               <a:rPr lang="en-US" u="sng" dirty="0"/>
-              <a:t>Data Cleaning: </a:t>
-            </a:r>
-            <a:r>
-              <a:rPr lang="en-US" dirty="0"/>
-              <a:t>The process of identifying and removing errors, inconsistencies, and irrelevant data from the data sources before they are integrated into the data warehouse. This helps ensure the data is accurate and trustworthy.</a:t>
-            </a:r>
-            <a:endParaRPr lang="en-US" dirty="0"/>
-          </a:p>
-          <a:p>
-            <a:endParaRPr lang="en-US" dirty="0"/>
-          </a:p>
-          <a:p>
-            <a:r>
-              <a:rPr lang="en-US" u="sng" dirty="0"/>
-              <a:t>Data Integration: </a:t>
+              <a:t> </a:t>
             </a:r>
             <a:r>
               <a:rPr lang="en-US" dirty="0"/>
@@ -6789,55 +6797,67 @@
         </p:spPr>
         <p:txBody>
           <a:bodyPr>
-            <a:normAutofit fontScale="92500" lnSpcReduction="10000"/>
+            <a:normAutofit fontScale="92500" lnSpcReduction="20000"/>
           </a:bodyPr>
           <a:lstStyle/>
           <a:p>
             <a:r>
+              <a:rPr lang="en-US" b="1" u="sng" dirty="0"/>
+              <a:t>Data Storage:</a:t>
+            </a:r>
+            <a:r>
+              <a:rPr lang="en-US" dirty="0"/>
+              <a:t> A data warehouse can store large amounts of historical data and make it easily accessible for analysis.</a:t>
+            </a:r>
+            <a:endParaRPr lang="en-US" dirty="0"/>
+          </a:p>
+          <a:p>
+            <a:endParaRPr lang="en-US" dirty="0"/>
+          </a:p>
+          <a:p>
+            <a:r>
+              <a:rPr lang="en-US" b="1" u="sng" dirty="0"/>
+              <a:t>Data Transformation:</a:t>
+            </a:r>
+            <a:r>
               <a:rPr lang="en-US" u="sng" dirty="0"/>
-              <a:t>Data Storage:</a:t>
-            </a:r>
-            <a:r>
-              <a:rPr lang="en-US" dirty="0"/>
-              <a:t> A data warehouse can store large amounts of historical data and make it easily accessible for analysis.</a:t>
-            </a:r>
-            <a:endParaRPr lang="en-US" dirty="0"/>
-          </a:p>
-          <a:p>
-            <a:endParaRPr lang="en-US" dirty="0"/>
-          </a:p>
-          <a:p>
+              <a:t> </a:t>
+            </a:r>
+            <a:r>
+              <a:rPr lang="en-US" dirty="0"/>
+              <a:t>Data can be transformed and cleaned to remove inconsistencies, duplicate data, or irrelevant information.</a:t>
+            </a:r>
+            <a:endParaRPr lang="en-US" dirty="0"/>
+          </a:p>
+          <a:p>
+            <a:endParaRPr lang="en-US" dirty="0"/>
+          </a:p>
+          <a:p>
+            <a:r>
+              <a:rPr lang="en-US" b="1" u="sng" dirty="0"/>
+              <a:t>Data Analysis:</a:t>
+            </a:r>
             <a:r>
               <a:rPr lang="en-US" u="sng" dirty="0"/>
-              <a:t>Data Transformation: </a:t>
-            </a:r>
-            <a:r>
-              <a:rPr lang="en-US" dirty="0"/>
-              <a:t>Data can be transformed and cleaned to remove inconsistencies, duplicate data, or irrelevant information.</a:t>
-            </a:r>
-            <a:endParaRPr lang="en-US" dirty="0"/>
-          </a:p>
-          <a:p>
-            <a:endParaRPr lang="en-US" dirty="0"/>
-          </a:p>
-          <a:p>
+              <a:t> </a:t>
+            </a:r>
+            <a:r>
+              <a:rPr lang="en-US" dirty="0"/>
+              <a:t>Data can be analyzed and visualized in various ways to gain insights and make informed decisions.</a:t>
+            </a:r>
+            <a:endParaRPr lang="en-US" dirty="0"/>
+          </a:p>
+          <a:p>
+            <a:endParaRPr lang="en-US" dirty="0"/>
+          </a:p>
+          <a:p>
+            <a:r>
+              <a:rPr lang="en-US" b="1" u="sng" dirty="0"/>
+              <a:t>Data Reporting</a:t>
+            </a:r>
             <a:r>
               <a:rPr lang="en-US" u="sng" dirty="0"/>
-              <a:t>Data Analysis: </a:t>
-            </a:r>
-            <a:r>
-              <a:rPr lang="en-US" dirty="0"/>
-              <a:t>Data can be analyzed and visualized in various ways to gain insights and make informed decisions.</a:t>
-            </a:r>
-            <a:endParaRPr lang="en-US" dirty="0"/>
-          </a:p>
-          <a:p>
-            <a:endParaRPr lang="en-US" dirty="0"/>
-          </a:p>
-          <a:p>
-            <a:r>
-              <a:rPr lang="en-US" u="sng" dirty="0"/>
-              <a:t>Data Reporting: </a:t>
+              <a:t>: </a:t>
             </a:r>
             <a:r>
               <a:rPr lang="en-US" dirty="0"/>
@@ -6850,21 +6870,25 @@
           </a:p>
           <a:p>
             <a:r>
-              <a:rPr lang="en-US" u="sng" dirty="0"/>
+              <a:rPr lang="en-US" b="1" u="sng" dirty="0"/>
               <a:t>Data Mining:</a:t>
             </a:r>
             <a:r>
-              <a:rPr lang="en-US" dirty="0"/>
-              <a:t> Data can be mined for patterns and trends to support decision-making and strategic planning.</a:t>
-            </a:r>
-            <a:endParaRPr lang="en-US" dirty="0"/>
-          </a:p>
-          <a:p>
-            <a:endParaRPr lang="en-US" dirty="0"/>
-          </a:p>
-          <a:p>
-            <a:r>
-              <a:rPr lang="en-US" u="sng" dirty="0"/>
+              <a:rPr lang="en-US" b="1" dirty="0"/>
+              <a:t> </a:t>
+            </a:r>
+            <a:r>
+              <a:rPr lang="en-US" dirty="0"/>
+              <a:t>Data can be mined for patterns and trends to support decision-making and strategic planning.</a:t>
+            </a:r>
+            <a:endParaRPr lang="en-US" dirty="0"/>
+          </a:p>
+          <a:p>
+            <a:endParaRPr lang="en-US" dirty="0"/>
+          </a:p>
+          <a:p>
+            <a:r>
+              <a:rPr lang="en-US" b="1" u="sng" dirty="0"/>
               <a:t>Performance Optimization: </a:t>
             </a:r>
             <a:r>
